--- a/submission/HeatGuard_Submission.pptx
+++ b/submission/HeatGuard_Submission.pptx
@@ -9899,7 +9899,7 @@
                 </a:solidFill>
                 <a:latin typeface="Outfit"/>
               </a:rPr>
-              <a:t>Live replay console: https://claude.ai/artifact/3zWxYgsZwFMgFTf4xGsLVu (open to reviewers on request).</a:t>
+              <a:t>Live replay console: https://abdulmannaan502.github.io/heatguard/  |  Code: https://github.com/abdulmannaan502/heatguard</a:t>
             </a:r>
           </a:p>
         </p:txBody>
